--- a/presentations/11_relationships_trialdesign.pptx
+++ b/presentations/11_relationships_trialdesign.pptx
@@ -1675,7 +1675,7 @@
             <a:r>
               <a:rPr lang="en-US" sz="1200" i="1" dirty="0">
                 <a:solidFill>
-                  <a:srgbClr val="5A7682"/>
+                  <a:srgbClr val="8FAEB8"/>
                 </a:solidFill>
                 <a:latin typeface="Calibri" pitchFamily="34" charset="0"/>
                 <a:ea typeface="Calibri" pitchFamily="34" charset="-122"/>
@@ -8703,7 +8703,7 @@
             <a:r>
               <a:rPr lang="en-US" sz="1200" b="1" dirty="0">
                 <a:solidFill>
-                  <a:srgbClr val="5A7682"/>
+                  <a:srgbClr val="8FAEB8"/>
                 </a:solidFill>
                 <a:latin typeface="Calibri" pitchFamily="34" charset="0"/>
                 <a:ea typeface="Calibri" pitchFamily="34" charset="-122"/>
